--- a/わんわん宇宙迎撃作戦.pptx
+++ b/わんわん宇宙迎撃作戦.pptx
@@ -104,6 +104,11 @@
       </a:defRPr>
     </a:lvl9pPr>
   </p:defaultTextStyle>
+  <p:extLst>
+    <p:ext uri="{EFAFB233-063F-42B5-8137-9DF3F51BA10A}">
+      <p15:sldGuideLst xmlns:p15="http://schemas.microsoft.com/office/powerpoint/2012/main"/>
+    </p:ext>
+  </p:extLst>
 </p:presentation>
 </file>
 
@@ -238,7 +243,7 @@
           <a:p>
             <a:fld id="{E45BC423-CDDF-4ECF-8343-D641C2C78842}" type="datetimeFigureOut">
               <a:rPr kumimoji="1" lang="ja-JP" altLang="en-US" smtClean="0"/>
-              <a:t>2026/1/15</a:t>
+              <a:t>2026/1/22</a:t>
             </a:fld>
             <a:endParaRPr kumimoji="1" lang="ja-JP" altLang="en-US"/>
           </a:p>
@@ -440,7 +445,7 @@
           <a:p>
             <a:fld id="{E45BC423-CDDF-4ECF-8343-D641C2C78842}" type="datetimeFigureOut">
               <a:rPr kumimoji="1" lang="ja-JP" altLang="en-US" smtClean="0"/>
-              <a:t>2026/1/15</a:t>
+              <a:t>2026/1/22</a:t>
             </a:fld>
             <a:endParaRPr kumimoji="1" lang="ja-JP" altLang="en-US"/>
           </a:p>
@@ -652,7 +657,7 @@
           <a:p>
             <a:fld id="{E45BC423-CDDF-4ECF-8343-D641C2C78842}" type="datetimeFigureOut">
               <a:rPr kumimoji="1" lang="ja-JP" altLang="en-US" smtClean="0"/>
-              <a:t>2026/1/15</a:t>
+              <a:t>2026/1/22</a:t>
             </a:fld>
             <a:endParaRPr kumimoji="1" lang="ja-JP" altLang="en-US"/>
           </a:p>
@@ -854,7 +859,7 @@
           <a:p>
             <a:fld id="{E45BC423-CDDF-4ECF-8343-D641C2C78842}" type="datetimeFigureOut">
               <a:rPr kumimoji="1" lang="ja-JP" altLang="en-US" smtClean="0"/>
-              <a:t>2026/1/15</a:t>
+              <a:t>2026/1/22</a:t>
             </a:fld>
             <a:endParaRPr kumimoji="1" lang="ja-JP" altLang="en-US"/>
           </a:p>
@@ -1098,7 +1103,7 @@
           <a:p>
             <a:fld id="{E45BC423-CDDF-4ECF-8343-D641C2C78842}" type="datetimeFigureOut">
               <a:rPr kumimoji="1" lang="ja-JP" altLang="en-US" smtClean="0"/>
-              <a:t>2026/1/15</a:t>
+              <a:t>2026/1/22</a:t>
             </a:fld>
             <a:endParaRPr kumimoji="1" lang="ja-JP" altLang="en-US"/>
           </a:p>
@@ -1394,7 +1399,7 @@
           <a:p>
             <a:fld id="{E45BC423-CDDF-4ECF-8343-D641C2C78842}" type="datetimeFigureOut">
               <a:rPr kumimoji="1" lang="ja-JP" altLang="en-US" smtClean="0"/>
-              <a:t>2026/1/15</a:t>
+              <a:t>2026/1/22</a:t>
             </a:fld>
             <a:endParaRPr kumimoji="1" lang="ja-JP" altLang="en-US"/>
           </a:p>
@@ -1825,7 +1830,7 @@
           <a:p>
             <a:fld id="{E45BC423-CDDF-4ECF-8343-D641C2C78842}" type="datetimeFigureOut">
               <a:rPr kumimoji="1" lang="ja-JP" altLang="en-US" smtClean="0"/>
-              <a:t>2026/1/15</a:t>
+              <a:t>2026/1/22</a:t>
             </a:fld>
             <a:endParaRPr kumimoji="1" lang="ja-JP" altLang="en-US"/>
           </a:p>
@@ -1943,7 +1948,7 @@
           <a:p>
             <a:fld id="{E45BC423-CDDF-4ECF-8343-D641C2C78842}" type="datetimeFigureOut">
               <a:rPr kumimoji="1" lang="ja-JP" altLang="en-US" smtClean="0"/>
-              <a:t>2026/1/15</a:t>
+              <a:t>2026/1/22</a:t>
             </a:fld>
             <a:endParaRPr kumimoji="1" lang="ja-JP" altLang="en-US"/>
           </a:p>
@@ -2038,7 +2043,7 @@
           <a:p>
             <a:fld id="{E45BC423-CDDF-4ECF-8343-D641C2C78842}" type="datetimeFigureOut">
               <a:rPr kumimoji="1" lang="ja-JP" altLang="en-US" smtClean="0"/>
-              <a:t>2026/1/15</a:t>
+              <a:t>2026/1/22</a:t>
             </a:fld>
             <a:endParaRPr kumimoji="1" lang="ja-JP" altLang="en-US"/>
           </a:p>
@@ -2347,7 +2352,7 @@
           <a:p>
             <a:fld id="{E45BC423-CDDF-4ECF-8343-D641C2C78842}" type="datetimeFigureOut">
               <a:rPr kumimoji="1" lang="ja-JP" altLang="en-US" smtClean="0"/>
-              <a:t>2026/1/15</a:t>
+              <a:t>2026/1/22</a:t>
             </a:fld>
             <a:endParaRPr kumimoji="1" lang="ja-JP" altLang="en-US"/>
           </a:p>
@@ -2604,7 +2609,7 @@
           <a:p>
             <a:fld id="{E45BC423-CDDF-4ECF-8343-D641C2C78842}" type="datetimeFigureOut">
               <a:rPr kumimoji="1" lang="ja-JP" altLang="en-US" smtClean="0"/>
-              <a:t>2026/1/15</a:t>
+              <a:t>2026/1/22</a:t>
             </a:fld>
             <a:endParaRPr kumimoji="1" lang="ja-JP" altLang="en-US"/>
           </a:p>
@@ -2849,7 +2854,7 @@
           <a:p>
             <a:fld id="{E45BC423-CDDF-4ECF-8343-D641C2C78842}" type="datetimeFigureOut">
               <a:rPr kumimoji="1" lang="ja-JP" altLang="en-US" smtClean="0"/>
-              <a:t>2026/1/15</a:t>
+              <a:t>2026/1/22</a:t>
             </a:fld>
             <a:endParaRPr kumimoji="1" lang="ja-JP" altLang="en-US"/>
           </a:p>
@@ -3271,6 +3276,311 @@
           <a:solidFill>
             <a:schemeClr val="bg1"/>
           </a:solidFill>
+          <a:ln>
+            <a:solidFill>
+              <a:schemeClr val="tx1"/>
+            </a:solidFill>
+          </a:ln>
+        </p:spPr>
+        <p:style>
+          <a:lnRef idx="2">
+            <a:schemeClr val="accent4">
+              <a:shade val="50000"/>
+            </a:schemeClr>
+          </a:lnRef>
+          <a:fillRef idx="1">
+            <a:schemeClr val="accent4"/>
+          </a:fillRef>
+          <a:effectRef idx="0">
+            <a:schemeClr val="accent4"/>
+          </a:effectRef>
+          <a:fontRef idx="minor">
+            <a:schemeClr val="lt1"/>
+          </a:fontRef>
+        </p:style>
+        <p:txBody>
+          <a:bodyPr rtlCol="0" anchor="ctr"/>
+          <a:lstStyle/>
+          <a:p>
+            <a:pPr algn="ctr"/>
+            <a:endParaRPr kumimoji="1" lang="ja-JP" altLang="en-US" dirty="0"/>
+          </a:p>
+        </p:txBody>
+      </p:sp>
+      <p:sp>
+        <p:nvSpPr>
+          <p:cNvPr id="4" name="テキスト ボックス 3"/>
+          <p:cNvSpPr txBox="1"/>
+          <p:nvPr/>
+        </p:nvSpPr>
+        <p:spPr>
+          <a:xfrm>
+            <a:off x="1722475" y="329608"/>
+            <a:ext cx="6340197" cy="830997"/>
+          </a:xfrm>
+          <a:prstGeom prst="rect">
+            <a:avLst/>
+          </a:prstGeom>
+          <a:solidFill>
+            <a:schemeClr val="bg1"/>
+          </a:solidFill>
+          <a:ln>
+            <a:solidFill>
+              <a:schemeClr val="tx1"/>
+            </a:solidFill>
+          </a:ln>
+        </p:spPr>
+        <p:style>
+          <a:lnRef idx="2">
+            <a:schemeClr val="accent4">
+              <a:shade val="50000"/>
+            </a:schemeClr>
+          </a:lnRef>
+          <a:fillRef idx="1">
+            <a:schemeClr val="accent4"/>
+          </a:fillRef>
+          <a:effectRef idx="0">
+            <a:schemeClr val="accent4"/>
+          </a:effectRef>
+          <a:fontRef idx="minor">
+            <a:schemeClr val="lt1"/>
+          </a:fontRef>
+        </p:style>
+        <p:txBody>
+          <a:bodyPr wrap="none" rtlCol="0">
+            <a:spAutoFit/>
+          </a:bodyPr>
+          <a:lstStyle/>
+          <a:p>
+            <a:r>
+              <a:rPr kumimoji="1" lang="ja-JP" altLang="en-US" sz="4800" dirty="0" smtClean="0">
+                <a:solidFill>
+                  <a:schemeClr val="tx1"/>
+                </a:solidFill>
+              </a:rPr>
+              <a:t>わんわん宇宙迎撃作戦</a:t>
+            </a:r>
+            <a:endParaRPr kumimoji="1" lang="ja-JP" altLang="en-US" sz="4800" dirty="0">
+              <a:solidFill>
+                <a:schemeClr val="tx1"/>
+              </a:solidFill>
+            </a:endParaRPr>
+          </a:p>
+        </p:txBody>
+      </p:sp>
+      <p:sp>
+        <p:nvSpPr>
+          <p:cNvPr id="6" name="テキスト ボックス 5"/>
+          <p:cNvSpPr txBox="1"/>
+          <p:nvPr/>
+        </p:nvSpPr>
+        <p:spPr>
+          <a:xfrm>
+            <a:off x="6294475" y="6211669"/>
+            <a:ext cx="3152370" cy="646331"/>
+          </a:xfrm>
+          <a:prstGeom prst="rect">
+            <a:avLst/>
+          </a:prstGeom>
+          <a:noFill/>
+        </p:spPr>
+        <p:txBody>
+          <a:bodyPr wrap="square" rtlCol="0">
+            <a:spAutoFit/>
+          </a:bodyPr>
+          <a:lstStyle/>
+          <a:p>
+            <a:r>
+              <a:rPr lang="ja-JP" altLang="en-US" dirty="0" smtClean="0"/>
+              <a:t>情報クリエイタ工学科２年　坂口　耕汰</a:t>
+            </a:r>
+            <a:endParaRPr kumimoji="1" lang="ja-JP" altLang="en-US" dirty="0"/>
+          </a:p>
+        </p:txBody>
+      </p:sp>
+      <p:sp>
+        <p:nvSpPr>
+          <p:cNvPr id="2" name="テキスト ボックス 1"/>
+          <p:cNvSpPr txBox="1"/>
+          <p:nvPr/>
+        </p:nvSpPr>
+        <p:spPr>
+          <a:xfrm>
+            <a:off x="1568586" y="1275538"/>
+            <a:ext cx="6647974" cy="830997"/>
+          </a:xfrm>
+          <a:prstGeom prst="rect">
+            <a:avLst/>
+          </a:prstGeom>
+          <a:noFill/>
+        </p:spPr>
+        <p:txBody>
+          <a:bodyPr wrap="none" rtlCol="0">
+            <a:spAutoFit/>
+          </a:bodyPr>
+          <a:lstStyle/>
+          <a:p>
+            <a:r>
+              <a:rPr kumimoji="1" lang="ja-JP" altLang="en-US" sz="2400" dirty="0" smtClean="0">
+                <a:solidFill>
+                  <a:srgbClr val="FF0000"/>
+                </a:solidFill>
+              </a:rPr>
+              <a:t>　　　　　制限時間まで</a:t>
+            </a:r>
+            <a:r>
+              <a:rPr lang="ja-JP" altLang="en-US" sz="2400" dirty="0" smtClean="0">
+                <a:solidFill>
+                  <a:srgbClr val="FF0000"/>
+                </a:solidFill>
+              </a:rPr>
+              <a:t>犬</a:t>
+            </a:r>
+            <a:r>
+              <a:rPr lang="ja-JP" altLang="en-US" sz="2400" dirty="0">
+                <a:solidFill>
+                  <a:srgbClr val="FF0000"/>
+                </a:solidFill>
+              </a:rPr>
+              <a:t>を</a:t>
+            </a:r>
+            <a:r>
+              <a:rPr lang="ja-JP" altLang="en-US" sz="2400" dirty="0" smtClean="0">
+                <a:solidFill>
+                  <a:srgbClr val="FF0000"/>
+                </a:solidFill>
+              </a:rPr>
+              <a:t>指示して</a:t>
+            </a:r>
+            <a:endParaRPr lang="en-US" altLang="ja-JP" sz="2400" dirty="0" smtClean="0">
+              <a:solidFill>
+                <a:srgbClr val="FF0000"/>
+              </a:solidFill>
+            </a:endParaRPr>
+          </a:p>
+          <a:p>
+            <a:r>
+              <a:rPr lang="ja-JP" altLang="en-US" sz="2400" dirty="0" smtClean="0">
+                <a:solidFill>
+                  <a:srgbClr val="FF0000"/>
+                </a:solidFill>
+              </a:rPr>
+              <a:t>エイリアン</a:t>
+            </a:r>
+            <a:r>
+              <a:rPr lang="ja-JP" altLang="en-US" sz="2400">
+                <a:solidFill>
+                  <a:srgbClr val="FF0000"/>
+                </a:solidFill>
+              </a:rPr>
+              <a:t>を</a:t>
+            </a:r>
+            <a:r>
+              <a:rPr lang="ja-JP" altLang="en-US" sz="2400" smtClean="0">
+                <a:solidFill>
+                  <a:srgbClr val="FF0000"/>
+                </a:solidFill>
+              </a:rPr>
+              <a:t>倒し、ハイスコア</a:t>
+            </a:r>
+            <a:r>
+              <a:rPr lang="ja-JP" altLang="en-US" sz="2400" dirty="0" smtClean="0">
+                <a:solidFill>
+                  <a:srgbClr val="FF0000"/>
+                </a:solidFill>
+              </a:rPr>
+              <a:t>を目指そう！！</a:t>
+            </a:r>
+            <a:endParaRPr kumimoji="1" lang="ja-JP" altLang="en-US" sz="2400" dirty="0">
+              <a:solidFill>
+                <a:srgbClr val="FF0000"/>
+              </a:solidFill>
+            </a:endParaRPr>
+          </a:p>
+        </p:txBody>
+      </p:sp>
+      <p:pic>
+        <p:nvPicPr>
+          <p:cNvPr id="3" name="図 2"/>
+          <p:cNvPicPr>
+            <a:picLocks noChangeAspect="1"/>
+          </p:cNvPicPr>
+          <p:nvPr/>
+        </p:nvPicPr>
+        <p:blipFill>
+          <a:blip r:embed="rId2" cstate="print">
+            <a:extLst>
+              <a:ext uri="{28A0092B-C50C-407E-A947-70E740481C1C}">
+                <a14:useLocalDpi xmlns:a14="http://schemas.microsoft.com/office/drawing/2010/main" val="0"/>
+              </a:ext>
+            </a:extLst>
+          </a:blip>
+          <a:stretch>
+            <a:fillRect/>
+          </a:stretch>
+        </p:blipFill>
+        <p:spPr>
+          <a:xfrm>
+            <a:off x="5513692" y="2279797"/>
+            <a:ext cx="1230820" cy="1059780"/>
+          </a:xfrm>
+          <a:prstGeom prst="rect">
+            <a:avLst/>
+          </a:prstGeom>
+        </p:spPr>
+      </p:pic>
+      <p:pic>
+        <p:nvPicPr>
+          <p:cNvPr id="7" name="図 6"/>
+          <p:cNvPicPr>
+            <a:picLocks noChangeAspect="1"/>
+          </p:cNvPicPr>
+          <p:nvPr/>
+        </p:nvPicPr>
+        <p:blipFill>
+          <a:blip r:embed="rId3" cstate="print">
+            <a:extLst>
+              <a:ext uri="{28A0092B-C50C-407E-A947-70E740481C1C}">
+                <a14:useLocalDpi xmlns:a14="http://schemas.microsoft.com/office/drawing/2010/main" val="0"/>
+              </a:ext>
+            </a:extLst>
+          </a:blip>
+          <a:stretch>
+            <a:fillRect/>
+          </a:stretch>
+        </p:blipFill>
+        <p:spPr>
+          <a:xfrm rot="1467076">
+            <a:off x="8301231" y="1615549"/>
+            <a:ext cx="1151504" cy="1970124"/>
+          </a:xfrm>
+          <a:prstGeom prst="rect">
+            <a:avLst/>
+          </a:prstGeom>
+        </p:spPr>
+      </p:pic>
+      <p:sp>
+        <p:nvSpPr>
+          <p:cNvPr id="12" name="正方形/長方形 11"/>
+          <p:cNvSpPr/>
+          <p:nvPr/>
+        </p:nvSpPr>
+        <p:spPr>
+          <a:xfrm>
+            <a:off x="597019" y="3030069"/>
+            <a:ext cx="4581037" cy="1138952"/>
+          </a:xfrm>
+          <a:prstGeom prst="rect">
+            <a:avLst/>
+          </a:prstGeom>
+          <a:solidFill>
+            <a:schemeClr val="bg1"/>
+          </a:solidFill>
+          <a:ln>
+            <a:solidFill>
+              <a:schemeClr val="tx1"/>
+            </a:solidFill>
+          </a:ln>
         </p:spPr>
         <p:style>
           <a:lnRef idx="2">
@@ -3299,59 +3609,74 @@
       </p:sp>
       <p:sp>
         <p:nvSpPr>
-          <p:cNvPr id="4" name="テキスト ボックス 3"/>
-          <p:cNvSpPr txBox="1"/>
+          <p:cNvPr id="9" name="正方形/長方形 8"/>
+          <p:cNvSpPr/>
           <p:nvPr/>
         </p:nvSpPr>
         <p:spPr>
           <a:xfrm>
-            <a:off x="1722475" y="329608"/>
-            <a:ext cx="6340197" cy="830997"/>
+            <a:off x="1892661" y="2812102"/>
+            <a:ext cx="2094613" cy="435935"/>
           </a:xfrm>
           <a:prstGeom prst="rect">
             <a:avLst/>
           </a:prstGeom>
+          <a:solidFill>
+            <a:schemeClr val="bg1"/>
+          </a:solidFill>
+          <a:ln>
+            <a:solidFill>
+              <a:schemeClr val="tx1"/>
+            </a:solidFill>
+          </a:ln>
         </p:spPr>
         <p:style>
           <a:lnRef idx="2">
-            <a:schemeClr val="accent5">
+            <a:schemeClr val="accent4">
               <a:shade val="50000"/>
             </a:schemeClr>
           </a:lnRef>
           <a:fillRef idx="1">
-            <a:schemeClr val="accent5"/>
+            <a:schemeClr val="accent4"/>
           </a:fillRef>
           <a:effectRef idx="0">
-            <a:schemeClr val="accent5"/>
+            <a:schemeClr val="accent4"/>
           </a:effectRef>
           <a:fontRef idx="minor">
             <a:schemeClr val="lt1"/>
           </a:fontRef>
         </p:style>
         <p:txBody>
-          <a:bodyPr wrap="none" rtlCol="0">
-            <a:spAutoFit/>
-          </a:bodyPr>
-          <a:lstStyle/>
-          <a:p>
-            <a:r>
-              <a:rPr kumimoji="1" lang="ja-JP" altLang="en-US" sz="4800" dirty="0" smtClean="0"/>
-              <a:t>わんわん宇宙迎撃作戦</a:t>
-            </a:r>
-            <a:endParaRPr kumimoji="1" lang="ja-JP" altLang="en-US" sz="4800" dirty="0"/>
-          </a:p>
-        </p:txBody>
-      </p:sp>
-      <p:sp>
-        <p:nvSpPr>
-          <p:cNvPr id="6" name="テキスト ボックス 5"/>
+          <a:bodyPr rtlCol="0" anchor="ctr"/>
+          <a:lstStyle/>
+          <a:p>
+            <a:pPr algn="ctr"/>
+            <a:r>
+              <a:rPr kumimoji="1" lang="ja-JP" altLang="en-US" dirty="0" smtClean="0">
+                <a:solidFill>
+                  <a:schemeClr val="tx1"/>
+                </a:solidFill>
+              </a:rPr>
+              <a:t>操作方法</a:t>
+            </a:r>
+            <a:endParaRPr kumimoji="1" lang="ja-JP" altLang="en-US" dirty="0">
+              <a:solidFill>
+                <a:schemeClr val="tx1"/>
+              </a:solidFill>
+            </a:endParaRPr>
+          </a:p>
+        </p:txBody>
+      </p:sp>
+      <p:sp>
+        <p:nvSpPr>
+          <p:cNvPr id="11" name="テキスト ボックス 10"/>
           <p:cNvSpPr txBox="1"/>
           <p:nvPr/>
         </p:nvSpPr>
         <p:spPr>
           <a:xfrm>
-            <a:off x="6373668" y="6231507"/>
-            <a:ext cx="2328897" cy="646331"/>
+            <a:off x="597019" y="3245691"/>
+            <a:ext cx="4685898" cy="923330"/>
           </a:xfrm>
           <a:prstGeom prst="rect">
             <a:avLst/>
@@ -3359,16 +3684,494 @@
           <a:noFill/>
         </p:spPr>
         <p:txBody>
-          <a:bodyPr wrap="square" rtlCol="0">
+          <a:bodyPr wrap="none" rtlCol="0">
             <a:spAutoFit/>
           </a:bodyPr>
           <a:lstStyle/>
           <a:p>
             <a:r>
+              <a:rPr kumimoji="1" lang="ja-JP" altLang="en-US" dirty="0" smtClean="0"/>
+              <a:t>マウスの右クリック</a:t>
+            </a:r>
+            <a:r>
+              <a:rPr kumimoji="1" lang="en-US" altLang="ja-JP" dirty="0" smtClean="0"/>
+              <a:t>+</a:t>
+            </a:r>
+            <a:r>
+              <a:rPr kumimoji="1" lang="ja-JP" altLang="en-US" dirty="0" smtClean="0"/>
+              <a:t>マウス移動：</a:t>
+            </a:r>
+            <a:r>
+              <a:rPr kumimoji="1" lang="ja-JP" altLang="en-US" dirty="0" smtClean="0">
+                <a:solidFill>
+                  <a:srgbClr val="FF0000"/>
+                </a:solidFill>
+              </a:rPr>
+              <a:t>視点操作</a:t>
+            </a:r>
+            <a:endParaRPr kumimoji="1" lang="en-US" altLang="ja-JP" dirty="0" smtClean="0">
+              <a:solidFill>
+                <a:srgbClr val="FF0000"/>
+              </a:solidFill>
+            </a:endParaRPr>
+          </a:p>
+          <a:p>
+            <a:r>
+              <a:rPr kumimoji="1" lang="en-US" altLang="ja-JP" dirty="0" smtClean="0"/>
+              <a:t>Q</a:t>
+            </a:r>
+            <a:r>
+              <a:rPr kumimoji="1" lang="ja-JP" altLang="en-US" dirty="0" smtClean="0"/>
+              <a:t>キー：</a:t>
+            </a:r>
+            <a:r>
+              <a:rPr kumimoji="1" lang="ja-JP" altLang="en-US" dirty="0" smtClean="0">
+                <a:solidFill>
+                  <a:srgbClr val="FF0000"/>
+                </a:solidFill>
+              </a:rPr>
+              <a:t>移動・攻撃切り替え</a:t>
+            </a:r>
+            <a:endParaRPr kumimoji="1" lang="en-US" altLang="ja-JP" dirty="0" smtClean="0">
+              <a:solidFill>
+                <a:srgbClr val="FF0000"/>
+              </a:solidFill>
+            </a:endParaRPr>
+          </a:p>
+          <a:p>
+            <a:r>
               <a:rPr lang="ja-JP" altLang="en-US" dirty="0" smtClean="0"/>
-              <a:t>クリエイタ学科２年　坂口　耕汰</a:t>
-            </a:r>
-            <a:endParaRPr kumimoji="1" lang="ja-JP" altLang="en-US" dirty="0"/>
+              <a:t>スペースキー：</a:t>
+            </a:r>
+            <a:r>
+              <a:rPr lang="ja-JP" altLang="en-US" dirty="0" smtClean="0">
+                <a:solidFill>
+                  <a:srgbClr val="FF0000"/>
+                </a:solidFill>
+              </a:rPr>
+              <a:t>ジャンプ</a:t>
+            </a:r>
+            <a:endParaRPr lang="en-US" altLang="ja-JP" dirty="0" smtClean="0">
+              <a:solidFill>
+                <a:srgbClr val="FF0000"/>
+              </a:solidFill>
+            </a:endParaRPr>
+          </a:p>
+        </p:txBody>
+      </p:sp>
+      <p:sp>
+        <p:nvSpPr>
+          <p:cNvPr id="14" name="正方形/長方形 13"/>
+          <p:cNvSpPr/>
+          <p:nvPr/>
+        </p:nvSpPr>
+        <p:spPr>
+          <a:xfrm>
+            <a:off x="597019" y="4387785"/>
+            <a:ext cx="1951495" cy="1598345"/>
+          </a:xfrm>
+          <a:prstGeom prst="rect">
+            <a:avLst/>
+          </a:prstGeom>
+          <a:solidFill>
+            <a:schemeClr val="bg1"/>
+          </a:solidFill>
+          <a:ln>
+            <a:solidFill>
+              <a:schemeClr val="tx1"/>
+            </a:solidFill>
+          </a:ln>
+        </p:spPr>
+        <p:style>
+          <a:lnRef idx="2">
+            <a:schemeClr val="accent1">
+              <a:shade val="50000"/>
+            </a:schemeClr>
+          </a:lnRef>
+          <a:fillRef idx="1">
+            <a:schemeClr val="accent1"/>
+          </a:fillRef>
+          <a:effectRef idx="0">
+            <a:schemeClr val="accent1"/>
+          </a:effectRef>
+          <a:fontRef idx="minor">
+            <a:schemeClr val="lt1"/>
+          </a:fontRef>
+        </p:style>
+        <p:txBody>
+          <a:bodyPr rtlCol="0" anchor="ctr"/>
+          <a:lstStyle/>
+          <a:p>
+            <a:pPr algn="ctr"/>
+            <a:r>
+              <a:rPr lang="ja-JP" altLang="en-US" dirty="0">
+                <a:solidFill>
+                  <a:schemeClr val="tx1"/>
+                </a:solidFill>
+              </a:rPr>
+              <a:t>左</a:t>
+            </a:r>
+            <a:r>
+              <a:rPr lang="ja-JP" altLang="en-US" dirty="0" smtClean="0">
+                <a:solidFill>
+                  <a:schemeClr val="tx1"/>
+                </a:solidFill>
+              </a:rPr>
+              <a:t>クリック</a:t>
+            </a:r>
+            <a:endParaRPr lang="en-US" altLang="ja-JP" dirty="0" smtClean="0">
+              <a:solidFill>
+                <a:schemeClr val="tx1"/>
+              </a:solidFill>
+            </a:endParaRPr>
+          </a:p>
+          <a:p>
+            <a:pPr algn="ctr"/>
+            <a:r>
+              <a:rPr kumimoji="1" lang="ja-JP" altLang="en-US" dirty="0" smtClean="0">
+                <a:solidFill>
+                  <a:srgbClr val="FF0000"/>
+                </a:solidFill>
+              </a:rPr>
+              <a:t>カーソル位置に移動</a:t>
+            </a:r>
+            <a:endParaRPr kumimoji="1" lang="en-US" altLang="ja-JP" dirty="0" smtClean="0">
+              <a:solidFill>
+                <a:srgbClr val="FF0000"/>
+              </a:solidFill>
+            </a:endParaRPr>
+          </a:p>
+          <a:p>
+            <a:pPr algn="ctr"/>
+            <a:r>
+              <a:rPr lang="en-US" altLang="ja-JP" dirty="0" smtClean="0">
+                <a:solidFill>
+                  <a:srgbClr val="FF0000"/>
+                </a:solidFill>
+              </a:rPr>
+              <a:t>※</a:t>
+            </a:r>
+            <a:r>
+              <a:rPr lang="ja-JP" altLang="en-US" dirty="0" smtClean="0">
+                <a:solidFill>
+                  <a:srgbClr val="FF0000"/>
+                </a:solidFill>
+              </a:rPr>
+              <a:t>攻撃できない</a:t>
+            </a:r>
+            <a:endParaRPr kumimoji="1" lang="en-US" altLang="ja-JP" dirty="0" smtClean="0">
+              <a:solidFill>
+                <a:srgbClr val="FF0000"/>
+              </a:solidFill>
+            </a:endParaRPr>
+          </a:p>
+        </p:txBody>
+      </p:sp>
+      <p:sp>
+        <p:nvSpPr>
+          <p:cNvPr id="13" name="正方形/長方形 12"/>
+          <p:cNvSpPr/>
+          <p:nvPr/>
+        </p:nvSpPr>
+        <p:spPr>
+          <a:xfrm>
+            <a:off x="797442" y="4169021"/>
+            <a:ext cx="1360967" cy="437528"/>
+          </a:xfrm>
+          <a:prstGeom prst="rect">
+            <a:avLst/>
+          </a:prstGeom>
+          <a:solidFill>
+            <a:schemeClr val="bg1"/>
+          </a:solidFill>
+          <a:ln>
+            <a:solidFill>
+              <a:schemeClr val="tx1"/>
+            </a:solidFill>
+          </a:ln>
+        </p:spPr>
+        <p:style>
+          <a:lnRef idx="2">
+            <a:schemeClr val="accent1">
+              <a:shade val="50000"/>
+            </a:schemeClr>
+          </a:lnRef>
+          <a:fillRef idx="1">
+            <a:schemeClr val="accent1"/>
+          </a:fillRef>
+          <a:effectRef idx="0">
+            <a:schemeClr val="accent1"/>
+          </a:effectRef>
+          <a:fontRef idx="minor">
+            <a:schemeClr val="lt1"/>
+          </a:fontRef>
+        </p:style>
+        <p:txBody>
+          <a:bodyPr rtlCol="0" anchor="ctr"/>
+          <a:lstStyle/>
+          <a:p>
+            <a:pPr algn="ctr"/>
+            <a:r>
+              <a:rPr kumimoji="1" lang="ja-JP" altLang="en-US" dirty="0" smtClean="0">
+                <a:solidFill>
+                  <a:schemeClr val="tx1"/>
+                </a:solidFill>
+              </a:rPr>
+              <a:t>移動</a:t>
+            </a:r>
+            <a:endParaRPr kumimoji="1" lang="ja-JP" altLang="en-US" dirty="0">
+              <a:solidFill>
+                <a:schemeClr val="tx1"/>
+              </a:solidFill>
+            </a:endParaRPr>
+          </a:p>
+        </p:txBody>
+      </p:sp>
+      <p:sp>
+        <p:nvSpPr>
+          <p:cNvPr id="15" name="正方形/長方形 14"/>
+          <p:cNvSpPr/>
+          <p:nvPr/>
+        </p:nvSpPr>
+        <p:spPr>
+          <a:xfrm>
+            <a:off x="2544492" y="4391497"/>
+            <a:ext cx="1951495" cy="1598345"/>
+          </a:xfrm>
+          <a:prstGeom prst="rect">
+            <a:avLst/>
+          </a:prstGeom>
+          <a:solidFill>
+            <a:schemeClr val="bg1"/>
+          </a:solidFill>
+          <a:ln>
+            <a:solidFill>
+              <a:schemeClr val="tx1"/>
+            </a:solidFill>
+          </a:ln>
+        </p:spPr>
+        <p:style>
+          <a:lnRef idx="2">
+            <a:schemeClr val="accent1">
+              <a:shade val="50000"/>
+            </a:schemeClr>
+          </a:lnRef>
+          <a:fillRef idx="1">
+            <a:schemeClr val="accent1"/>
+          </a:fillRef>
+          <a:effectRef idx="0">
+            <a:schemeClr val="accent1"/>
+          </a:effectRef>
+          <a:fontRef idx="minor">
+            <a:schemeClr val="lt1"/>
+          </a:fontRef>
+        </p:style>
+        <p:txBody>
+          <a:bodyPr rtlCol="0" anchor="ctr"/>
+          <a:lstStyle/>
+          <a:p>
+            <a:pPr algn="ctr"/>
+            <a:r>
+              <a:rPr lang="ja-JP" altLang="en-US" dirty="0">
+                <a:solidFill>
+                  <a:schemeClr val="tx1"/>
+                </a:solidFill>
+              </a:rPr>
+              <a:t>左</a:t>
+            </a:r>
+            <a:r>
+              <a:rPr lang="ja-JP" altLang="en-US" dirty="0" smtClean="0">
+                <a:solidFill>
+                  <a:schemeClr val="tx1"/>
+                </a:solidFill>
+              </a:rPr>
+              <a:t>クリック</a:t>
+            </a:r>
+            <a:endParaRPr lang="en-US" altLang="ja-JP" dirty="0" smtClean="0">
+              <a:solidFill>
+                <a:schemeClr val="tx1"/>
+              </a:solidFill>
+            </a:endParaRPr>
+          </a:p>
+          <a:p>
+            <a:pPr algn="ctr"/>
+            <a:r>
+              <a:rPr lang="ja-JP" altLang="en-US" dirty="0" smtClean="0">
+                <a:solidFill>
+                  <a:srgbClr val="FF0000"/>
+                </a:solidFill>
+              </a:rPr>
+              <a:t>攻撃</a:t>
+            </a:r>
+            <a:endParaRPr lang="en-US" altLang="ja-JP" dirty="0" smtClean="0">
+              <a:solidFill>
+                <a:srgbClr val="FF0000"/>
+              </a:solidFill>
+            </a:endParaRPr>
+          </a:p>
+          <a:p>
+            <a:pPr algn="ctr"/>
+            <a:r>
+              <a:rPr lang="en-US" altLang="ja-JP" dirty="0" smtClean="0">
+                <a:solidFill>
+                  <a:srgbClr val="FF0000"/>
+                </a:solidFill>
+              </a:rPr>
+              <a:t>※</a:t>
+            </a:r>
+            <a:r>
+              <a:rPr lang="ja-JP" altLang="en-US" dirty="0">
+                <a:solidFill>
+                  <a:srgbClr val="FF0000"/>
+                </a:solidFill>
+              </a:rPr>
+              <a:t>移動</a:t>
+            </a:r>
+            <a:r>
+              <a:rPr lang="ja-JP" altLang="en-US" dirty="0" smtClean="0">
+                <a:solidFill>
+                  <a:srgbClr val="FF0000"/>
+                </a:solidFill>
+              </a:rPr>
+              <a:t>できない</a:t>
+            </a:r>
+            <a:endParaRPr kumimoji="1" lang="en-US" altLang="ja-JP" dirty="0" smtClean="0">
+              <a:solidFill>
+                <a:srgbClr val="FF0000"/>
+              </a:solidFill>
+            </a:endParaRPr>
+          </a:p>
+        </p:txBody>
+      </p:sp>
+      <p:sp>
+        <p:nvSpPr>
+          <p:cNvPr id="16" name="正方形/長方形 15"/>
+          <p:cNvSpPr/>
+          <p:nvPr/>
+        </p:nvSpPr>
+        <p:spPr>
+          <a:xfrm>
+            <a:off x="2744915" y="4172733"/>
+            <a:ext cx="1360967" cy="437528"/>
+          </a:xfrm>
+          <a:prstGeom prst="rect">
+            <a:avLst/>
+          </a:prstGeom>
+          <a:solidFill>
+            <a:schemeClr val="bg1"/>
+          </a:solidFill>
+          <a:ln>
+            <a:solidFill>
+              <a:schemeClr val="tx1"/>
+            </a:solidFill>
+          </a:ln>
+        </p:spPr>
+        <p:style>
+          <a:lnRef idx="2">
+            <a:schemeClr val="accent1">
+              <a:shade val="50000"/>
+            </a:schemeClr>
+          </a:lnRef>
+          <a:fillRef idx="1">
+            <a:schemeClr val="accent1"/>
+          </a:fillRef>
+          <a:effectRef idx="0">
+            <a:schemeClr val="accent1"/>
+          </a:effectRef>
+          <a:fontRef idx="minor">
+            <a:schemeClr val="lt1"/>
+          </a:fontRef>
+        </p:style>
+        <p:txBody>
+          <a:bodyPr rtlCol="0" anchor="ctr"/>
+          <a:lstStyle/>
+          <a:p>
+            <a:pPr algn="ctr"/>
+            <a:r>
+              <a:rPr lang="ja-JP" altLang="en-US" dirty="0">
+                <a:solidFill>
+                  <a:schemeClr val="tx1"/>
+                </a:solidFill>
+              </a:rPr>
+              <a:t>攻撃</a:t>
+            </a:r>
+            <a:endParaRPr kumimoji="1" lang="ja-JP" altLang="en-US" dirty="0">
+              <a:solidFill>
+                <a:schemeClr val="tx1"/>
+              </a:solidFill>
+            </a:endParaRPr>
+          </a:p>
+        </p:txBody>
+      </p:sp>
+      <p:pic>
+        <p:nvPicPr>
+          <p:cNvPr id="17" name="図 16"/>
+          <p:cNvPicPr>
+            <a:picLocks noChangeAspect="1"/>
+          </p:cNvPicPr>
+          <p:nvPr/>
+        </p:nvPicPr>
+        <p:blipFill>
+          <a:blip r:embed="rId4"/>
+          <a:stretch>
+            <a:fillRect/>
+          </a:stretch>
+        </p:blipFill>
+        <p:spPr>
+          <a:xfrm>
+            <a:off x="5335983" y="3755617"/>
+            <a:ext cx="4100582" cy="2043844"/>
+          </a:xfrm>
+          <a:prstGeom prst="rect">
+            <a:avLst/>
+          </a:prstGeom>
+        </p:spPr>
+      </p:pic>
+      <p:sp>
+        <p:nvSpPr>
+          <p:cNvPr id="18" name="楕円 17"/>
+          <p:cNvSpPr/>
+          <p:nvPr/>
+        </p:nvSpPr>
+        <p:spPr>
+          <a:xfrm>
+            <a:off x="7802016" y="2164607"/>
+            <a:ext cx="414544" cy="436004"/>
+          </a:xfrm>
+          <a:prstGeom prst="ellipse">
+            <a:avLst/>
+          </a:prstGeom>
+          <a:solidFill>
+            <a:schemeClr val="bg1"/>
+          </a:solidFill>
+          <a:ln>
+            <a:solidFill>
+              <a:schemeClr val="tx1"/>
+            </a:solidFill>
+          </a:ln>
+        </p:spPr>
+        <p:style>
+          <a:lnRef idx="2">
+            <a:schemeClr val="accent1">
+              <a:shade val="50000"/>
+            </a:schemeClr>
+          </a:lnRef>
+          <a:fillRef idx="1">
+            <a:schemeClr val="accent1"/>
+          </a:fillRef>
+          <a:effectRef idx="0">
+            <a:schemeClr val="accent1"/>
+          </a:effectRef>
+          <a:fontRef idx="minor">
+            <a:schemeClr val="lt1"/>
+          </a:fontRef>
+        </p:style>
+        <p:txBody>
+          <a:bodyPr rtlCol="0" anchor="ctr"/>
+          <a:lstStyle/>
+          <a:p>
+            <a:pPr algn="ctr"/>
+            <a:endParaRPr kumimoji="1" lang="ja-JP" altLang="en-US"/>
           </a:p>
         </p:txBody>
       </p:sp>
